--- a/chapter12/parts/part-03-formats-and-storage-types/clip.pptx
+++ b/chapter12/parts/part-03-formats-and-storage-types/clip.pptx
@@ -4397,10 +4397,12 @@
           </a:bodyPr>
           <a:lstStyle/>
           <a:p>
-            <a:pPr>
+            <a:pPr lvl="0" marL="457200" indent="-228600">
+              <a:buFont typeface="Calibri"/>
               <a:spcAft>
                 <a:spcPts val="1000"/>
               </a:spcAft>
+              <a:buSzPct val="100000"/>
               <a:buChar char="•"/>
               <a:lnSpc>
                 <a:spcPts val="2200"/>
@@ -4417,10 +4419,12 @@
             </a:r>
           </a:p>
           <a:p>
-            <a:pPr>
+            <a:pPr lvl="0" marL="457200" indent="-228600">
+              <a:buFont typeface="Calibri"/>
               <a:spcAft>
                 <a:spcPts val="1000"/>
               </a:spcAft>
+              <a:buSzPct val="100000"/>
               <a:buChar char="•"/>
               <a:lnSpc>
                 <a:spcPts val="2200"/>
@@ -4437,10 +4441,12 @@
             </a:r>
           </a:p>
           <a:p>
-            <a:pPr>
+            <a:pPr lvl="0" marL="457200" indent="-228600">
+              <a:buFont typeface="Calibri"/>
               <a:spcAft>
                 <a:spcPts val="1000"/>
               </a:spcAft>
+              <a:buSzPct val="100000"/>
               <a:buChar char="•"/>
               <a:lnSpc>
                 <a:spcPts val="2200"/>
@@ -4457,10 +4463,12 @@
             </a:r>
           </a:p>
           <a:p>
-            <a:pPr>
+            <a:pPr lvl="0" marL="457200" indent="-228600">
+              <a:buFont typeface="Calibri"/>
               <a:spcAft>
                 <a:spcPts val="1000"/>
               </a:spcAft>
+              <a:buSzPct val="100000"/>
               <a:buChar char="•"/>
               <a:lnSpc>
                 <a:spcPts val="2200"/>
@@ -4596,10 +4604,12 @@
           </a:bodyPr>
           <a:lstStyle/>
           <a:p>
-            <a:pPr>
+            <a:pPr lvl="0" marL="457200" indent="-228600">
+              <a:buFont typeface="Calibri"/>
               <a:spcAft>
                 <a:spcPts val="1000"/>
               </a:spcAft>
+              <a:buSzPct val="100000"/>
               <a:buChar char="•"/>
               <a:lnSpc>
                 <a:spcPts val="2200"/>
@@ -4616,10 +4626,12 @@
             </a:r>
           </a:p>
           <a:p>
-            <a:pPr>
+            <a:pPr lvl="0" marL="457200" indent="-228600">
+              <a:buFont typeface="Calibri"/>
               <a:spcAft>
                 <a:spcPts val="1000"/>
               </a:spcAft>
+              <a:buSzPct val="100000"/>
               <a:buChar char="•"/>
               <a:lnSpc>
                 <a:spcPts val="2200"/>
@@ -4755,10 +4767,12 @@
           </a:bodyPr>
           <a:lstStyle/>
           <a:p>
-            <a:pPr>
+            <a:pPr lvl="0" marL="457200" indent="-228600">
+              <a:buFont typeface="Calibri"/>
               <a:spcAft>
                 <a:spcPts val="1000"/>
               </a:spcAft>
+              <a:buSzPct val="100000"/>
               <a:buChar char="•"/>
               <a:lnSpc>
                 <a:spcPts val="2200"/>
@@ -4894,10 +4908,12 @@
           </a:bodyPr>
           <a:lstStyle/>
           <a:p>
-            <a:pPr>
+            <a:pPr lvl="0" marL="457200" indent="-228600">
+              <a:buFont typeface="Calibri"/>
               <a:spcAft>
                 <a:spcPts val="1000"/>
               </a:spcAft>
+              <a:buSzPct val="100000"/>
               <a:buChar char="•"/>
               <a:lnSpc>
                 <a:spcPts val="2200"/>
@@ -4914,10 +4930,12 @@
             </a:r>
           </a:p>
           <a:p>
-            <a:pPr>
+            <a:pPr lvl="0" marL="457200" indent="-228600">
+              <a:buFont typeface="Calibri"/>
               <a:spcAft>
                 <a:spcPts val="1000"/>
               </a:spcAft>
+              <a:buSzPct val="100000"/>
               <a:buChar char="•"/>
               <a:lnSpc>
                 <a:spcPts val="2200"/>
@@ -5053,10 +5071,12 @@
           </a:bodyPr>
           <a:lstStyle/>
           <a:p>
-            <a:pPr>
+            <a:pPr lvl="0" marL="457200" indent="-228600">
+              <a:buFont typeface="Calibri"/>
               <a:spcAft>
                 <a:spcPts val="1000"/>
               </a:spcAft>
+              <a:buSzPct val="100000"/>
               <a:buChar char="•"/>
               <a:lnSpc>
                 <a:spcPts val="2200"/>
@@ -5073,10 +5093,12 @@
             </a:r>
           </a:p>
           <a:p>
-            <a:pPr>
+            <a:pPr lvl="0" marL="457200" indent="-228600">
+              <a:buFont typeface="Calibri"/>
               <a:spcAft>
                 <a:spcPts val="1000"/>
               </a:spcAft>
+              <a:buSzPct val="100000"/>
               <a:buChar char="•"/>
               <a:lnSpc>
                 <a:spcPts val="2200"/>
@@ -5093,10 +5115,12 @@
             </a:r>
           </a:p>
           <a:p>
-            <a:pPr>
+            <a:pPr lvl="0" marL="457200" indent="-228600">
+              <a:buFont typeface="Calibri"/>
               <a:spcAft>
                 <a:spcPts val="1000"/>
               </a:spcAft>
+              <a:buSzPct val="100000"/>
               <a:buChar char="•"/>
               <a:lnSpc>
                 <a:spcPts val="2200"/>
@@ -5113,10 +5137,12 @@
             </a:r>
           </a:p>
           <a:p>
-            <a:pPr>
+            <a:pPr lvl="0" marL="457200" indent="-228600">
+              <a:buFont typeface="Calibri"/>
               <a:spcAft>
                 <a:spcPts val="1000"/>
               </a:spcAft>
+              <a:buSzPct val="100000"/>
               <a:buChar char="•"/>
               <a:lnSpc>
                 <a:spcPts val="2200"/>
@@ -5133,10 +5159,12 @@
             </a:r>
           </a:p>
           <a:p>
-            <a:pPr>
+            <a:pPr lvl="0" marL="457200" indent="-228600">
+              <a:buFont typeface="Calibri"/>
               <a:spcAft>
                 <a:spcPts val="1000"/>
               </a:spcAft>
+              <a:buSzPct val="100000"/>
               <a:buChar char="•"/>
               <a:lnSpc>
                 <a:spcPts val="2200"/>
@@ -5272,10 +5300,12 @@
           </a:bodyPr>
           <a:lstStyle/>
           <a:p>
-            <a:pPr>
+            <a:pPr lvl="0" marL="457200" indent="-228600">
+              <a:buFont typeface="Calibri"/>
               <a:spcAft>
                 <a:spcPts val="1000"/>
               </a:spcAft>
+              <a:buSzPct val="100000"/>
               <a:buChar char="•"/>
               <a:lnSpc>
                 <a:spcPts val="2200"/>
@@ -5292,10 +5322,12 @@
             </a:r>
           </a:p>
           <a:p>
-            <a:pPr>
+            <a:pPr lvl="0" marL="457200" indent="-228600">
+              <a:buFont typeface="Calibri"/>
               <a:spcAft>
                 <a:spcPts val="1000"/>
               </a:spcAft>
+              <a:buSzPct val="100000"/>
               <a:buChar char="•"/>
               <a:lnSpc>
                 <a:spcPts val="2200"/>
@@ -5312,10 +5344,12 @@
             </a:r>
           </a:p>
           <a:p>
-            <a:pPr>
+            <a:pPr lvl="0" marL="457200" indent="-228600">
+              <a:buFont typeface="Calibri"/>
               <a:spcAft>
                 <a:spcPts val="1000"/>
               </a:spcAft>
+              <a:buSzPct val="100000"/>
               <a:buChar char="•"/>
               <a:lnSpc>
                 <a:spcPts val="2200"/>
@@ -5332,10 +5366,12 @@
             </a:r>
           </a:p>
           <a:p>
-            <a:pPr>
+            <a:pPr lvl="0" marL="457200" indent="-228600">
+              <a:buFont typeface="Calibri"/>
               <a:spcAft>
                 <a:spcPts val="1000"/>
               </a:spcAft>
+              <a:buSzPct val="100000"/>
               <a:buChar char="•"/>
               <a:lnSpc>
                 <a:spcPts val="2200"/>
@@ -5352,10 +5388,12 @@
             </a:r>
           </a:p>
           <a:p>
-            <a:pPr>
+            <a:pPr lvl="0" marL="457200" indent="-228600">
+              <a:buFont typeface="Calibri"/>
               <a:spcAft>
                 <a:spcPts val="1000"/>
               </a:spcAft>
+              <a:buSzPct val="100000"/>
               <a:buChar char="•"/>
               <a:lnSpc>
                 <a:spcPts val="2200"/>
@@ -5491,10 +5529,12 @@
           </a:bodyPr>
           <a:lstStyle/>
           <a:p>
-            <a:pPr>
+            <a:pPr lvl="0" marL="457200" indent="-228600">
+              <a:buFont typeface="Calibri"/>
               <a:spcAft>
                 <a:spcPts val="1000"/>
               </a:spcAft>
+              <a:buSzPct val="100000"/>
               <a:buChar char="•"/>
               <a:lnSpc>
                 <a:spcPts val="2200"/>
@@ -5511,10 +5551,12 @@
             </a:r>
           </a:p>
           <a:p>
-            <a:pPr>
+            <a:pPr lvl="0" marL="457200" indent="-228600">
+              <a:buFont typeface="Calibri"/>
               <a:spcAft>
                 <a:spcPts val="1000"/>
               </a:spcAft>
+              <a:buSzPct val="100000"/>
               <a:buChar char="•"/>
               <a:lnSpc>
                 <a:spcPts val="2200"/>
@@ -5531,10 +5573,12 @@
             </a:r>
           </a:p>
           <a:p>
-            <a:pPr>
+            <a:pPr lvl="0" marL="457200" indent="-228600">
+              <a:buFont typeface="Calibri"/>
               <a:spcAft>
                 <a:spcPts val="1000"/>
               </a:spcAft>
+              <a:buSzPct val="100000"/>
               <a:buChar char="•"/>
               <a:lnSpc>
                 <a:spcPts val="2200"/>
@@ -5670,10 +5714,12 @@
           </a:bodyPr>
           <a:lstStyle/>
           <a:p>
-            <a:pPr>
+            <a:pPr lvl="0" marL="457200" indent="-228600">
+              <a:buFont typeface="Calibri"/>
               <a:spcAft>
                 <a:spcPts val="1000"/>
               </a:spcAft>
+              <a:buSzPct val="100000"/>
               <a:buChar char="•"/>
               <a:lnSpc>
                 <a:spcPts val="2200"/>
@@ -5690,10 +5736,12 @@
             </a:r>
           </a:p>
           <a:p>
-            <a:pPr>
+            <a:pPr lvl="0" marL="457200" indent="-228600">
+              <a:buFont typeface="Calibri"/>
               <a:spcAft>
                 <a:spcPts val="1000"/>
               </a:spcAft>
+              <a:buSzPct val="100000"/>
               <a:buChar char="•"/>
               <a:lnSpc>
                 <a:spcPts val="2200"/>
@@ -5710,10 +5758,12 @@
             </a:r>
           </a:p>
           <a:p>
-            <a:pPr>
+            <a:pPr lvl="0" marL="457200" indent="-228600">
+              <a:buFont typeface="Calibri"/>
               <a:spcAft>
                 <a:spcPts val="1000"/>
               </a:spcAft>
+              <a:buSzPct val="100000"/>
               <a:buChar char="•"/>
               <a:lnSpc>
                 <a:spcPts val="2200"/>
@@ -5730,10 +5780,12 @@
             </a:r>
           </a:p>
           <a:p>
-            <a:pPr>
+            <a:pPr lvl="0" marL="457200" indent="-228600">
+              <a:buFont typeface="Calibri"/>
               <a:spcAft>
                 <a:spcPts val="1000"/>
               </a:spcAft>
+              <a:buSzPct val="100000"/>
               <a:buChar char="•"/>
               <a:lnSpc>
                 <a:spcPts val="2200"/>
@@ -5750,10 +5802,12 @@
             </a:r>
           </a:p>
           <a:p>
-            <a:pPr>
+            <a:pPr lvl="0" marL="457200" indent="-228600">
+              <a:buFont typeface="Calibri"/>
               <a:spcAft>
                 <a:spcPts val="1000"/>
               </a:spcAft>
+              <a:buSzPct val="100000"/>
               <a:buChar char="•"/>
               <a:lnSpc>
                 <a:spcPts val="2200"/>
@@ -5889,10 +5943,12 @@
           </a:bodyPr>
           <a:lstStyle/>
           <a:p>
-            <a:pPr>
+            <a:pPr lvl="0" marL="457200" indent="-228600">
+              <a:buFont typeface="Calibri"/>
               <a:spcAft>
                 <a:spcPts val="1000"/>
               </a:spcAft>
+              <a:buSzPct val="100000"/>
               <a:buChar char="•"/>
               <a:lnSpc>
                 <a:spcPts val="2200"/>
@@ -5909,10 +5965,12 @@
             </a:r>
           </a:p>
           <a:p>
-            <a:pPr>
+            <a:pPr lvl="0" marL="457200" indent="-228600">
+              <a:buFont typeface="Calibri"/>
               <a:spcAft>
                 <a:spcPts val="1000"/>
               </a:spcAft>
+              <a:buSzPct val="100000"/>
               <a:buChar char="•"/>
               <a:lnSpc>
                 <a:spcPts val="2200"/>
@@ -5929,10 +5987,12 @@
             </a:r>
           </a:p>
           <a:p>
-            <a:pPr>
+            <a:pPr lvl="0" marL="457200" indent="-228600">
+              <a:buFont typeface="Calibri"/>
               <a:spcAft>
                 <a:spcPts val="1000"/>
               </a:spcAft>
+              <a:buSzPct val="100000"/>
               <a:buChar char="•"/>
               <a:lnSpc>
                 <a:spcPts val="2200"/>
@@ -5949,10 +6009,12 @@
             </a:r>
           </a:p>
           <a:p>
-            <a:pPr>
+            <a:pPr lvl="0" marL="457200" indent="-228600">
+              <a:buFont typeface="Calibri"/>
               <a:spcAft>
                 <a:spcPts val="1000"/>
               </a:spcAft>
+              <a:buSzPct val="100000"/>
               <a:buChar char="•"/>
               <a:lnSpc>
                 <a:spcPts val="2200"/>
@@ -5969,10 +6031,12 @@
             </a:r>
           </a:p>
           <a:p>
-            <a:pPr>
+            <a:pPr lvl="0" marL="457200" indent="-228600">
+              <a:buFont typeface="Calibri"/>
               <a:spcAft>
                 <a:spcPts val="1000"/>
               </a:spcAft>
+              <a:buSzPct val="100000"/>
               <a:buChar char="•"/>
               <a:lnSpc>
                 <a:spcPts val="2200"/>
@@ -5989,10 +6053,12 @@
             </a:r>
           </a:p>
           <a:p>
-            <a:pPr>
+            <a:pPr lvl="0" marL="457200" indent="-228600">
+              <a:buFont typeface="Calibri"/>
               <a:spcAft>
                 <a:spcPts val="1000"/>
               </a:spcAft>
+              <a:buSzPct val="100000"/>
               <a:buChar char="•"/>
               <a:lnSpc>
                 <a:spcPts val="2200"/>
@@ -6128,10 +6194,12 @@
           </a:bodyPr>
           <a:lstStyle/>
           <a:p>
-            <a:pPr>
+            <a:pPr lvl="0" marL="457200" indent="-228600">
+              <a:buFont typeface="Calibri"/>
               <a:spcAft>
                 <a:spcPts val="1000"/>
               </a:spcAft>
+              <a:buSzPct val="100000"/>
               <a:buChar char="•"/>
               <a:lnSpc>
                 <a:spcPts val="2200"/>
@@ -6148,10 +6216,12 @@
             </a:r>
           </a:p>
           <a:p>
-            <a:pPr>
+            <a:pPr lvl="0" marL="457200" indent="-228600">
+              <a:buFont typeface="Calibri"/>
               <a:spcAft>
                 <a:spcPts val="1000"/>
               </a:spcAft>
+              <a:buSzPct val="100000"/>
               <a:buChar char="•"/>
               <a:lnSpc>
                 <a:spcPts val="2200"/>
